--- a/tools/poi-dsl-exporter/showcase-out/ppt-table-showcase-rerun3.pptx
+++ b/tools/poi-dsl-exporter/showcase-out/ppt-table-showcase-rerun3.pptx
@@ -3085,14 +3085,38 @@
       </p:sp>
       <p:sp>
         <p:nvSpPr>
-          <p:cNvPr name="TextBox 3" id="3"/>
+          <p:cNvPr name="AutoShape 3" id="3"/>
+          <p:cNvSpPr/>
+          <p:nvPr/>
+        </p:nvSpPr>
+        <p:spPr>
+          <a:xfrm>
+            <a:off x="304800" y="495300"/>
+            <a:ext cx="11582400" cy="12700"/>
+          </a:xfrm>
+          <a:prstGeom prst="rect">
+            <a:avLst/>
+          </a:prstGeom>
+          <a:solidFill>
+            <a:srgbClr val="1D4ED8"/>
+          </a:solidFill>
+          <a:ln>
+            <a:solidFill>
+              <a:srgbClr val="1D4ED8"/>
+            </a:solidFill>
+          </a:ln>
+        </p:spPr>
+      </p:sp>
+      <p:sp>
+        <p:nvSpPr>
+          <p:cNvPr name="TextBox 4" id="4"/>
           <p:cNvSpPr txBox="true"/>
           <p:nvPr/>
         </p:nvSpPr>
         <p:spPr>
           <a:xfrm>
             <a:off x="304800" y="152400"/>
-            <a:ext cx="10922000" cy="508000"/>
+            <a:ext cx="11582400" cy="330200"/>
           </a:xfrm>
           <a:prstGeom prst="rect">
             <a:avLst/>
@@ -3119,20 +3143,100 @@
           <a:p>
             <a:pPr algn="l"/>
             <a:r>
-              <a:rPr lang="en-US" sz="1400" b="true">
+              <a:rPr lang="en-US" sz="1285" b="true">
                 <a:solidFill>
                   <a:srgbClr val="6B7280"/>
                 </a:solidFill>
-                <a:ea typeface="Source Sans 3"/>
+                <a:latin typeface="Source Sans 3"/>
               </a:rPr>
-              <a:t>多级表头与原生合并</a:t>
+              <a:t>PPT Table Showcase · 多级表头与原生合并</a:t>
             </a:r>
           </a:p>
         </p:txBody>
       </p:sp>
       <p:sp>
         <p:nvSpPr>
-          <p:cNvPr name="TextBox 4" id="4"/>
+          <p:cNvPr name="AutoShape 5" id="5"/>
+          <p:cNvSpPr/>
+          <p:nvPr/>
+        </p:nvSpPr>
+        <p:spPr>
+          <a:xfrm>
+            <a:off x="304800" y="6426200"/>
+            <a:ext cx="11582400" cy="12700"/>
+          </a:xfrm>
+          <a:prstGeom prst="rect">
+            <a:avLst/>
+          </a:prstGeom>
+          <a:solidFill>
+            <a:srgbClr val="1D4ED8"/>
+          </a:solidFill>
+          <a:ln>
+            <a:solidFill>
+              <a:srgbClr val="1D4ED8"/>
+            </a:solidFill>
+          </a:ln>
+        </p:spPr>
+      </p:sp>
+      <p:sp>
+        <p:nvSpPr>
+          <p:cNvPr name="TextBox 6" id="6"/>
+          <p:cNvSpPr txBox="true"/>
+          <p:nvPr/>
+        </p:nvSpPr>
+        <p:spPr>
+          <a:xfrm>
+            <a:off x="304800" y="6451600"/>
+            <a:ext cx="11582400" cy="279400"/>
+          </a:xfrm>
+          <a:prstGeom prst="rect">
+            <a:avLst/>
+          </a:prstGeom>
+          <a:solidFill>
+            <a:srgbClr val="FFFFFF">
+              <a:alpha val="0"/>
+            </a:srgbClr>
+          </a:solidFill>
+        </p:spPr>
+        <p:txBody>
+          <a:bodyPr anchor="t" rtlCol="false"/>
+          <a:lstStyle/>
+          <a:p>
+            <a:pPr algn="l">
+              <a:defRPr/>
+            </a:pPr>
+            <a:r>
+              <a:rPr lang="zh-CN"/>
+              <a:t/>
+            </a:r>
+            <a:endParaRPr lang="en-US" sz="1100"/>
+          </a:p>
+          <a:p>
+            <a:pPr algn="l"/>
+            <a:r>
+              <a:rPr lang="en-US" sz="1080">
+                <a:solidFill>
+                  <a:srgbClr val="6B7280"/>
+                </a:solidFill>
+                <a:latin typeface="Source Sans 3"/>
+              </a:rPr>
+              <a:t>Visual Document OS</a:t>
+            </a:r>
+            <a:r>
+              <a:rPr lang="en-US" sz="1000">
+                <a:solidFill>
+                  <a:srgbClr val="6B7280"/>
+                </a:solidFill>
+                <a:latin typeface="Source Sans 3"/>
+              </a:rPr>
+              <a:t>    #1/1</a:t>
+            </a:r>
+          </a:p>
+        </p:txBody>
+      </p:sp>
+      <p:sp>
+        <p:nvSpPr>
+          <p:cNvPr name="TextBox 7" id="7"/>
           <p:cNvSpPr txBox="true"/>
           <p:nvPr/>
         </p:nvSpPr>
@@ -3182,7 +3286,7 @@
       </p:sp>
       <p:graphicFrame>
         <p:nvGraphicFramePr>
-          <p:cNvPr name="Table 5" id="5"/>
+          <p:cNvPr name="Table 8" id="8"/>
           <p:cNvGraphicFramePr>
             <a:graphicFrameLocks noGrp="true"/>
           </p:cNvGraphicFramePr>
